--- a/.lessons/34 Packages Yajra Datatable/4 Add datatable export buttons/1.pptx
+++ b/.lessons/34 Packages Yajra Datatable/4 Add datatable export buttons/1.pptx
@@ -6,8 +6,16 @@
   </p:sldMasterIdLst>
   <p:sldIdLst>
     <p:sldId id="402" r:id="rId2"/>
-    <p:sldId id="403" r:id="rId3"/>
-    <p:sldId id="400" r:id="rId4"/>
+    <p:sldId id="404" r:id="rId3"/>
+    <p:sldId id="405" r:id="rId4"/>
+    <p:sldId id="406" r:id="rId5"/>
+    <p:sldId id="407" r:id="rId6"/>
+    <p:sldId id="408" r:id="rId7"/>
+    <p:sldId id="409" r:id="rId8"/>
+    <p:sldId id="410" r:id="rId9"/>
+    <p:sldId id="411" r:id="rId10"/>
+    <p:sldId id="403" r:id="rId11"/>
+    <p:sldId id="400" r:id="rId12"/>
   </p:sldIdLst>
   <p:sldSz cx="12192000" cy="6858000"/>
   <p:notesSz cx="6858000" cy="9144000"/>
@@ -261,7 +269,7 @@
           <a:p>
             <a:fld id="{3E102D2E-813C-461C-9963-687A650C48C0}" type="datetimeFigureOut">
               <a:rPr lang="en-US" smtClean="0"/>
-              <a:t>5/23/2025</a:t>
+              <a:t>6/16/2025</a:t>
             </a:fld>
             <a:endParaRPr lang="en-US"/>
           </a:p>
@@ -459,7 +467,7 @@
           <a:p>
             <a:fld id="{3E102D2E-813C-461C-9963-687A650C48C0}" type="datetimeFigureOut">
               <a:rPr lang="en-US" smtClean="0"/>
-              <a:t>5/23/2025</a:t>
+              <a:t>6/16/2025</a:t>
             </a:fld>
             <a:endParaRPr lang="en-US"/>
           </a:p>
@@ -667,7 +675,7 @@
           <a:p>
             <a:fld id="{3E102D2E-813C-461C-9963-687A650C48C0}" type="datetimeFigureOut">
               <a:rPr lang="en-US" smtClean="0"/>
-              <a:t>5/23/2025</a:t>
+              <a:t>6/16/2025</a:t>
             </a:fld>
             <a:endParaRPr lang="en-US"/>
           </a:p>
@@ -865,7 +873,7 @@
           <a:p>
             <a:fld id="{3E102D2E-813C-461C-9963-687A650C48C0}" type="datetimeFigureOut">
               <a:rPr lang="en-US" smtClean="0"/>
-              <a:t>5/23/2025</a:t>
+              <a:t>6/16/2025</a:t>
             </a:fld>
             <a:endParaRPr lang="en-US"/>
           </a:p>
@@ -1140,7 +1148,7 @@
           <a:p>
             <a:fld id="{3E102D2E-813C-461C-9963-687A650C48C0}" type="datetimeFigureOut">
               <a:rPr lang="en-US" smtClean="0"/>
-              <a:t>5/23/2025</a:t>
+              <a:t>6/16/2025</a:t>
             </a:fld>
             <a:endParaRPr lang="en-US"/>
           </a:p>
@@ -1405,7 +1413,7 @@
           <a:p>
             <a:fld id="{3E102D2E-813C-461C-9963-687A650C48C0}" type="datetimeFigureOut">
               <a:rPr lang="en-US" smtClean="0"/>
-              <a:t>5/23/2025</a:t>
+              <a:t>6/16/2025</a:t>
             </a:fld>
             <a:endParaRPr lang="en-US"/>
           </a:p>
@@ -1817,7 +1825,7 @@
           <a:p>
             <a:fld id="{3E102D2E-813C-461C-9963-687A650C48C0}" type="datetimeFigureOut">
               <a:rPr lang="en-US" smtClean="0"/>
-              <a:t>5/23/2025</a:t>
+              <a:t>6/16/2025</a:t>
             </a:fld>
             <a:endParaRPr lang="en-US"/>
           </a:p>
@@ -1958,7 +1966,7 @@
           <a:p>
             <a:fld id="{3E102D2E-813C-461C-9963-687A650C48C0}" type="datetimeFigureOut">
               <a:rPr lang="en-US" smtClean="0"/>
-              <a:t>5/23/2025</a:t>
+              <a:t>6/16/2025</a:t>
             </a:fld>
             <a:endParaRPr lang="en-US"/>
           </a:p>
@@ -2071,7 +2079,7 @@
           <a:p>
             <a:fld id="{3E102D2E-813C-461C-9963-687A650C48C0}" type="datetimeFigureOut">
               <a:rPr lang="en-US" smtClean="0"/>
-              <a:t>5/23/2025</a:t>
+              <a:t>6/16/2025</a:t>
             </a:fld>
             <a:endParaRPr lang="en-US"/>
           </a:p>
@@ -2382,7 +2390,7 @@
           <a:p>
             <a:fld id="{3E102D2E-813C-461C-9963-687A650C48C0}" type="datetimeFigureOut">
               <a:rPr lang="en-US" smtClean="0"/>
-              <a:t>5/23/2025</a:t>
+              <a:t>6/16/2025</a:t>
             </a:fld>
             <a:endParaRPr lang="en-US"/>
           </a:p>
@@ -2670,7 +2678,7 @@
           <a:p>
             <a:fld id="{3E102D2E-813C-461C-9963-687A650C48C0}" type="datetimeFigureOut">
               <a:rPr lang="en-US" smtClean="0"/>
-              <a:t>5/23/2025</a:t>
+              <a:t>6/16/2025</a:t>
             </a:fld>
             <a:endParaRPr lang="en-US"/>
           </a:p>
@@ -2911,7 +2919,7 @@
           <a:p>
             <a:fld id="{3E102D2E-813C-461C-9963-687A650C48C0}" type="datetimeFigureOut">
               <a:rPr lang="en-US" smtClean="0"/>
-              <a:t>5/23/2025</a:t>
+              <a:t>6/16/2025</a:t>
             </a:fld>
             <a:endParaRPr lang="en-US"/>
           </a:p>
@@ -3397,7 +3405,7 @@
 </p:sld>
 </file>
 
-<file path=ppt/slides/slide2.xml><?xml version="1.0" encoding="utf-8"?>
+<file path=ppt/slides/slide10.xml><?xml version="1.0" encoding="utf-8"?>
 <p:sld xmlns:a="http://schemas.openxmlformats.org/drawingml/2006/main" xmlns:r="http://schemas.openxmlformats.org/officeDocument/2006/relationships" xmlns:p="http://schemas.openxmlformats.org/presentationml/2006/main">
   <p:cSld>
     <p:spTree>
@@ -3483,7 +3491,7 @@
 </p:sld>
 </file>
 
-<file path=ppt/slides/slide3.xml><?xml version="1.0" encoding="utf-8"?>
+<file path=ppt/slides/slide11.xml><?xml version="1.0" encoding="utf-8"?>
 <p:sld xmlns:a="http://schemas.openxmlformats.org/drawingml/2006/main" xmlns:r="http://schemas.openxmlformats.org/officeDocument/2006/relationships" xmlns:p="http://schemas.openxmlformats.org/presentationml/2006/main">
   <p:cSld>
     <p:spTree>
@@ -3560,6 +3568,694 @@
     <p:extLst>
       <p:ext uri="{BB962C8B-B14F-4D97-AF65-F5344CB8AC3E}">
         <p14:creationId xmlns:p14="http://schemas.microsoft.com/office/powerpoint/2010/main" val="3095838342"/>
+      </p:ext>
+    </p:extLst>
+  </p:cSld>
+  <p:clrMapOvr>
+    <a:masterClrMapping/>
+  </p:clrMapOvr>
+</p:sld>
+</file>
+
+<file path=ppt/slides/slide2.xml><?xml version="1.0" encoding="utf-8"?>
+<p:sld xmlns:a="http://schemas.openxmlformats.org/drawingml/2006/main" xmlns:r="http://schemas.openxmlformats.org/officeDocument/2006/relationships" xmlns:p="http://schemas.openxmlformats.org/presentationml/2006/main">
+  <p:cSld>
+    <p:spTree>
+      <p:nvGrpSpPr>
+        <p:cNvPr id="1" name="">
+          <a:extLst>
+            <a:ext uri="{FF2B5EF4-FFF2-40B4-BE49-F238E27FC236}">
+              <a16:creationId xmlns:a16="http://schemas.microsoft.com/office/drawing/2014/main" id="{53FDC1C9-92E2-2BCD-481A-1A34F1739D11}"/>
+            </a:ext>
+          </a:extLst>
+        </p:cNvPr>
+        <p:cNvGrpSpPr/>
+        <p:nvPr/>
+      </p:nvGrpSpPr>
+      <p:grpSpPr>
+        <a:xfrm>
+          <a:off x="0" y="0"/>
+          <a:ext cx="0" cy="0"/>
+          <a:chOff x="0" y="0"/>
+          <a:chExt cx="0" cy="0"/>
+        </a:xfrm>
+      </p:grpSpPr>
+      <p:sp>
+        <p:nvSpPr>
+          <p:cNvPr id="3" name="TextBox 2">
+            <a:extLst>
+              <a:ext uri="{FF2B5EF4-FFF2-40B4-BE49-F238E27FC236}">
+                <a16:creationId xmlns:a16="http://schemas.microsoft.com/office/drawing/2014/main" id="{7C79AFB9-B21A-D299-6C2F-5AADC695C85A}"/>
+              </a:ext>
+            </a:extLst>
+          </p:cNvPr>
+          <p:cNvSpPr txBox="1"/>
+          <p:nvPr/>
+        </p:nvSpPr>
+        <p:spPr>
+          <a:xfrm>
+            <a:off x="217714" y="255046"/>
+            <a:ext cx="11756571" cy="355354"/>
+          </a:xfrm>
+          <a:prstGeom prst="rect">
+            <a:avLst/>
+          </a:prstGeom>
+          <a:noFill/>
+        </p:spPr>
+        <p:txBody>
+          <a:bodyPr wrap="square">
+            <a:spAutoFit/>
+          </a:bodyPr>
+          <a:lstStyle/>
+          <a:p>
+            <a:pPr>
+              <a:lnSpc>
+                <a:spcPct val="150000"/>
+              </a:lnSpc>
+              <a:buNone/>
+            </a:pPr>
+            <a:r>
+              <a:rPr kumimoji="0" lang="en-US" altLang="en-US" sz="1300" b="0" i="0" u="none" strike="noStrike" cap="none" normalizeH="0" baseline="0">
+                <a:ln>
+                  <a:noFill/>
+                </a:ln>
+                <a:solidFill>
+                  <a:schemeClr val="tx1"/>
+                </a:solidFill>
+                <a:effectLst/>
+                <a:latin typeface="Arial" panose="020B0604020202020204" pitchFamily="34" charset="0"/>
+              </a:rPr>
+              <a:t>.</a:t>
+            </a:r>
+          </a:p>
+        </p:txBody>
+      </p:sp>
+    </p:spTree>
+    <p:extLst>
+      <p:ext uri="{BB962C8B-B14F-4D97-AF65-F5344CB8AC3E}">
+        <p14:creationId xmlns:p14="http://schemas.microsoft.com/office/powerpoint/2010/main" val="281624308"/>
+      </p:ext>
+    </p:extLst>
+  </p:cSld>
+  <p:clrMapOvr>
+    <a:masterClrMapping/>
+  </p:clrMapOvr>
+</p:sld>
+</file>
+
+<file path=ppt/slides/slide3.xml><?xml version="1.0" encoding="utf-8"?>
+<p:sld xmlns:a="http://schemas.openxmlformats.org/drawingml/2006/main" xmlns:r="http://schemas.openxmlformats.org/officeDocument/2006/relationships" xmlns:p="http://schemas.openxmlformats.org/presentationml/2006/main">
+  <p:cSld>
+    <p:spTree>
+      <p:nvGrpSpPr>
+        <p:cNvPr id="1" name="">
+          <a:extLst>
+            <a:ext uri="{FF2B5EF4-FFF2-40B4-BE49-F238E27FC236}">
+              <a16:creationId xmlns:a16="http://schemas.microsoft.com/office/drawing/2014/main" id="{246C154E-24B5-FC68-1831-CA7A879B35DA}"/>
+            </a:ext>
+          </a:extLst>
+        </p:cNvPr>
+        <p:cNvGrpSpPr/>
+        <p:nvPr/>
+      </p:nvGrpSpPr>
+      <p:grpSpPr>
+        <a:xfrm>
+          <a:off x="0" y="0"/>
+          <a:ext cx="0" cy="0"/>
+          <a:chOff x="0" y="0"/>
+          <a:chExt cx="0" cy="0"/>
+        </a:xfrm>
+      </p:grpSpPr>
+      <p:sp>
+        <p:nvSpPr>
+          <p:cNvPr id="3" name="TextBox 2">
+            <a:extLst>
+              <a:ext uri="{FF2B5EF4-FFF2-40B4-BE49-F238E27FC236}">
+                <a16:creationId xmlns:a16="http://schemas.microsoft.com/office/drawing/2014/main" id="{E70C097E-5E0A-C8E7-8738-6D065ABD9671}"/>
+              </a:ext>
+            </a:extLst>
+          </p:cNvPr>
+          <p:cNvSpPr txBox="1"/>
+          <p:nvPr/>
+        </p:nvSpPr>
+        <p:spPr>
+          <a:xfrm>
+            <a:off x="217714" y="255046"/>
+            <a:ext cx="11756571" cy="355354"/>
+          </a:xfrm>
+          <a:prstGeom prst="rect">
+            <a:avLst/>
+          </a:prstGeom>
+          <a:noFill/>
+        </p:spPr>
+        <p:txBody>
+          <a:bodyPr wrap="square">
+            <a:spAutoFit/>
+          </a:bodyPr>
+          <a:lstStyle/>
+          <a:p>
+            <a:pPr>
+              <a:lnSpc>
+                <a:spcPct val="150000"/>
+              </a:lnSpc>
+              <a:buNone/>
+            </a:pPr>
+            <a:r>
+              <a:rPr kumimoji="0" lang="en-US" altLang="en-US" sz="1300" b="0" i="0" u="none" strike="noStrike" cap="none" normalizeH="0" baseline="0">
+                <a:ln>
+                  <a:noFill/>
+                </a:ln>
+                <a:solidFill>
+                  <a:schemeClr val="tx1"/>
+                </a:solidFill>
+                <a:effectLst/>
+                <a:latin typeface="Arial" panose="020B0604020202020204" pitchFamily="34" charset="0"/>
+              </a:rPr>
+              <a:t>.</a:t>
+            </a:r>
+          </a:p>
+        </p:txBody>
+      </p:sp>
+    </p:spTree>
+    <p:extLst>
+      <p:ext uri="{BB962C8B-B14F-4D97-AF65-F5344CB8AC3E}">
+        <p14:creationId xmlns:p14="http://schemas.microsoft.com/office/powerpoint/2010/main" val="698570674"/>
+      </p:ext>
+    </p:extLst>
+  </p:cSld>
+  <p:clrMapOvr>
+    <a:masterClrMapping/>
+  </p:clrMapOvr>
+</p:sld>
+</file>
+
+<file path=ppt/slides/slide4.xml><?xml version="1.0" encoding="utf-8"?>
+<p:sld xmlns:a="http://schemas.openxmlformats.org/drawingml/2006/main" xmlns:r="http://schemas.openxmlformats.org/officeDocument/2006/relationships" xmlns:p="http://schemas.openxmlformats.org/presentationml/2006/main">
+  <p:cSld>
+    <p:spTree>
+      <p:nvGrpSpPr>
+        <p:cNvPr id="1" name="">
+          <a:extLst>
+            <a:ext uri="{FF2B5EF4-FFF2-40B4-BE49-F238E27FC236}">
+              <a16:creationId xmlns:a16="http://schemas.microsoft.com/office/drawing/2014/main" id="{CAF74AE5-27D7-2A0C-55F6-EF6B21BB4396}"/>
+            </a:ext>
+          </a:extLst>
+        </p:cNvPr>
+        <p:cNvGrpSpPr/>
+        <p:nvPr/>
+      </p:nvGrpSpPr>
+      <p:grpSpPr>
+        <a:xfrm>
+          <a:off x="0" y="0"/>
+          <a:ext cx="0" cy="0"/>
+          <a:chOff x="0" y="0"/>
+          <a:chExt cx="0" cy="0"/>
+        </a:xfrm>
+      </p:grpSpPr>
+      <p:sp>
+        <p:nvSpPr>
+          <p:cNvPr id="3" name="TextBox 2">
+            <a:extLst>
+              <a:ext uri="{FF2B5EF4-FFF2-40B4-BE49-F238E27FC236}">
+                <a16:creationId xmlns:a16="http://schemas.microsoft.com/office/drawing/2014/main" id="{AE969875-DD56-3F7E-BCCB-B863697E25CD}"/>
+              </a:ext>
+            </a:extLst>
+          </p:cNvPr>
+          <p:cNvSpPr txBox="1"/>
+          <p:nvPr/>
+        </p:nvSpPr>
+        <p:spPr>
+          <a:xfrm>
+            <a:off x="217714" y="255046"/>
+            <a:ext cx="11756571" cy="355354"/>
+          </a:xfrm>
+          <a:prstGeom prst="rect">
+            <a:avLst/>
+          </a:prstGeom>
+          <a:noFill/>
+        </p:spPr>
+        <p:txBody>
+          <a:bodyPr wrap="square">
+            <a:spAutoFit/>
+          </a:bodyPr>
+          <a:lstStyle/>
+          <a:p>
+            <a:pPr>
+              <a:lnSpc>
+                <a:spcPct val="150000"/>
+              </a:lnSpc>
+              <a:buNone/>
+            </a:pPr>
+            <a:r>
+              <a:rPr kumimoji="0" lang="en-US" altLang="en-US" sz="1300" b="0" i="0" u="none" strike="noStrike" cap="none" normalizeH="0" baseline="0">
+                <a:ln>
+                  <a:noFill/>
+                </a:ln>
+                <a:solidFill>
+                  <a:schemeClr val="tx1"/>
+                </a:solidFill>
+                <a:effectLst/>
+                <a:latin typeface="Arial" panose="020B0604020202020204" pitchFamily="34" charset="0"/>
+              </a:rPr>
+              <a:t>.</a:t>
+            </a:r>
+          </a:p>
+        </p:txBody>
+      </p:sp>
+    </p:spTree>
+    <p:extLst>
+      <p:ext uri="{BB962C8B-B14F-4D97-AF65-F5344CB8AC3E}">
+        <p14:creationId xmlns:p14="http://schemas.microsoft.com/office/powerpoint/2010/main" val="2249877506"/>
+      </p:ext>
+    </p:extLst>
+  </p:cSld>
+  <p:clrMapOvr>
+    <a:masterClrMapping/>
+  </p:clrMapOvr>
+</p:sld>
+</file>
+
+<file path=ppt/slides/slide5.xml><?xml version="1.0" encoding="utf-8"?>
+<p:sld xmlns:a="http://schemas.openxmlformats.org/drawingml/2006/main" xmlns:r="http://schemas.openxmlformats.org/officeDocument/2006/relationships" xmlns:p="http://schemas.openxmlformats.org/presentationml/2006/main">
+  <p:cSld>
+    <p:spTree>
+      <p:nvGrpSpPr>
+        <p:cNvPr id="1" name="">
+          <a:extLst>
+            <a:ext uri="{FF2B5EF4-FFF2-40B4-BE49-F238E27FC236}">
+              <a16:creationId xmlns:a16="http://schemas.microsoft.com/office/drawing/2014/main" id="{A2B841F7-89F1-27BC-A531-F69204F6E057}"/>
+            </a:ext>
+          </a:extLst>
+        </p:cNvPr>
+        <p:cNvGrpSpPr/>
+        <p:nvPr/>
+      </p:nvGrpSpPr>
+      <p:grpSpPr>
+        <a:xfrm>
+          <a:off x="0" y="0"/>
+          <a:ext cx="0" cy="0"/>
+          <a:chOff x="0" y="0"/>
+          <a:chExt cx="0" cy="0"/>
+        </a:xfrm>
+      </p:grpSpPr>
+      <p:sp>
+        <p:nvSpPr>
+          <p:cNvPr id="3" name="TextBox 2">
+            <a:extLst>
+              <a:ext uri="{FF2B5EF4-FFF2-40B4-BE49-F238E27FC236}">
+                <a16:creationId xmlns:a16="http://schemas.microsoft.com/office/drawing/2014/main" id="{7FA63CB6-1A9A-F391-02B4-7C5CAB501FD7}"/>
+              </a:ext>
+            </a:extLst>
+          </p:cNvPr>
+          <p:cNvSpPr txBox="1"/>
+          <p:nvPr/>
+        </p:nvSpPr>
+        <p:spPr>
+          <a:xfrm>
+            <a:off x="217714" y="255046"/>
+            <a:ext cx="11756571" cy="355354"/>
+          </a:xfrm>
+          <a:prstGeom prst="rect">
+            <a:avLst/>
+          </a:prstGeom>
+          <a:noFill/>
+        </p:spPr>
+        <p:txBody>
+          <a:bodyPr wrap="square">
+            <a:spAutoFit/>
+          </a:bodyPr>
+          <a:lstStyle/>
+          <a:p>
+            <a:pPr>
+              <a:lnSpc>
+                <a:spcPct val="150000"/>
+              </a:lnSpc>
+              <a:buNone/>
+            </a:pPr>
+            <a:r>
+              <a:rPr kumimoji="0" lang="en-US" altLang="en-US" sz="1300" b="0" i="0" u="none" strike="noStrike" cap="none" normalizeH="0" baseline="0">
+                <a:ln>
+                  <a:noFill/>
+                </a:ln>
+                <a:solidFill>
+                  <a:schemeClr val="tx1"/>
+                </a:solidFill>
+                <a:effectLst/>
+                <a:latin typeface="Arial" panose="020B0604020202020204" pitchFamily="34" charset="0"/>
+              </a:rPr>
+              <a:t>.</a:t>
+            </a:r>
+          </a:p>
+        </p:txBody>
+      </p:sp>
+    </p:spTree>
+    <p:extLst>
+      <p:ext uri="{BB962C8B-B14F-4D97-AF65-F5344CB8AC3E}">
+        <p14:creationId xmlns:p14="http://schemas.microsoft.com/office/powerpoint/2010/main" val="3168033996"/>
+      </p:ext>
+    </p:extLst>
+  </p:cSld>
+  <p:clrMapOvr>
+    <a:masterClrMapping/>
+  </p:clrMapOvr>
+</p:sld>
+</file>
+
+<file path=ppt/slides/slide6.xml><?xml version="1.0" encoding="utf-8"?>
+<p:sld xmlns:a="http://schemas.openxmlformats.org/drawingml/2006/main" xmlns:r="http://schemas.openxmlformats.org/officeDocument/2006/relationships" xmlns:p="http://schemas.openxmlformats.org/presentationml/2006/main">
+  <p:cSld>
+    <p:spTree>
+      <p:nvGrpSpPr>
+        <p:cNvPr id="1" name="">
+          <a:extLst>
+            <a:ext uri="{FF2B5EF4-FFF2-40B4-BE49-F238E27FC236}">
+              <a16:creationId xmlns:a16="http://schemas.microsoft.com/office/drawing/2014/main" id="{D9119E50-7DEE-91BE-62BE-D790D3332B76}"/>
+            </a:ext>
+          </a:extLst>
+        </p:cNvPr>
+        <p:cNvGrpSpPr/>
+        <p:nvPr/>
+      </p:nvGrpSpPr>
+      <p:grpSpPr>
+        <a:xfrm>
+          <a:off x="0" y="0"/>
+          <a:ext cx="0" cy="0"/>
+          <a:chOff x="0" y="0"/>
+          <a:chExt cx="0" cy="0"/>
+        </a:xfrm>
+      </p:grpSpPr>
+      <p:sp>
+        <p:nvSpPr>
+          <p:cNvPr id="3" name="TextBox 2">
+            <a:extLst>
+              <a:ext uri="{FF2B5EF4-FFF2-40B4-BE49-F238E27FC236}">
+                <a16:creationId xmlns:a16="http://schemas.microsoft.com/office/drawing/2014/main" id="{22C39FF7-FF27-4A20-BC6C-B5B3F7E51601}"/>
+              </a:ext>
+            </a:extLst>
+          </p:cNvPr>
+          <p:cNvSpPr txBox="1"/>
+          <p:nvPr/>
+        </p:nvSpPr>
+        <p:spPr>
+          <a:xfrm>
+            <a:off x="217714" y="255046"/>
+            <a:ext cx="11756571" cy="355354"/>
+          </a:xfrm>
+          <a:prstGeom prst="rect">
+            <a:avLst/>
+          </a:prstGeom>
+          <a:noFill/>
+        </p:spPr>
+        <p:txBody>
+          <a:bodyPr wrap="square">
+            <a:spAutoFit/>
+          </a:bodyPr>
+          <a:lstStyle/>
+          <a:p>
+            <a:pPr>
+              <a:lnSpc>
+                <a:spcPct val="150000"/>
+              </a:lnSpc>
+              <a:buNone/>
+            </a:pPr>
+            <a:r>
+              <a:rPr kumimoji="0" lang="en-US" altLang="en-US" sz="1300" b="0" i="0" u="none" strike="noStrike" cap="none" normalizeH="0" baseline="0">
+                <a:ln>
+                  <a:noFill/>
+                </a:ln>
+                <a:solidFill>
+                  <a:schemeClr val="tx1"/>
+                </a:solidFill>
+                <a:effectLst/>
+                <a:latin typeface="Arial" panose="020B0604020202020204" pitchFamily="34" charset="0"/>
+              </a:rPr>
+              <a:t>.</a:t>
+            </a:r>
+          </a:p>
+        </p:txBody>
+      </p:sp>
+    </p:spTree>
+    <p:extLst>
+      <p:ext uri="{BB962C8B-B14F-4D97-AF65-F5344CB8AC3E}">
+        <p14:creationId xmlns:p14="http://schemas.microsoft.com/office/powerpoint/2010/main" val="2217335707"/>
+      </p:ext>
+    </p:extLst>
+  </p:cSld>
+  <p:clrMapOvr>
+    <a:masterClrMapping/>
+  </p:clrMapOvr>
+</p:sld>
+</file>
+
+<file path=ppt/slides/slide7.xml><?xml version="1.0" encoding="utf-8"?>
+<p:sld xmlns:a="http://schemas.openxmlformats.org/drawingml/2006/main" xmlns:r="http://schemas.openxmlformats.org/officeDocument/2006/relationships" xmlns:p="http://schemas.openxmlformats.org/presentationml/2006/main">
+  <p:cSld>
+    <p:spTree>
+      <p:nvGrpSpPr>
+        <p:cNvPr id="1" name="">
+          <a:extLst>
+            <a:ext uri="{FF2B5EF4-FFF2-40B4-BE49-F238E27FC236}">
+              <a16:creationId xmlns:a16="http://schemas.microsoft.com/office/drawing/2014/main" id="{2206F6C3-A761-C0C5-C852-0B605F8CC3B8}"/>
+            </a:ext>
+          </a:extLst>
+        </p:cNvPr>
+        <p:cNvGrpSpPr/>
+        <p:nvPr/>
+      </p:nvGrpSpPr>
+      <p:grpSpPr>
+        <a:xfrm>
+          <a:off x="0" y="0"/>
+          <a:ext cx="0" cy="0"/>
+          <a:chOff x="0" y="0"/>
+          <a:chExt cx="0" cy="0"/>
+        </a:xfrm>
+      </p:grpSpPr>
+      <p:sp>
+        <p:nvSpPr>
+          <p:cNvPr id="3" name="TextBox 2">
+            <a:extLst>
+              <a:ext uri="{FF2B5EF4-FFF2-40B4-BE49-F238E27FC236}">
+                <a16:creationId xmlns:a16="http://schemas.microsoft.com/office/drawing/2014/main" id="{A9009F11-43FA-B6C8-3FBF-8697CCA9401E}"/>
+              </a:ext>
+            </a:extLst>
+          </p:cNvPr>
+          <p:cNvSpPr txBox="1"/>
+          <p:nvPr/>
+        </p:nvSpPr>
+        <p:spPr>
+          <a:xfrm>
+            <a:off x="217714" y="255046"/>
+            <a:ext cx="11756571" cy="355354"/>
+          </a:xfrm>
+          <a:prstGeom prst="rect">
+            <a:avLst/>
+          </a:prstGeom>
+          <a:noFill/>
+        </p:spPr>
+        <p:txBody>
+          <a:bodyPr wrap="square">
+            <a:spAutoFit/>
+          </a:bodyPr>
+          <a:lstStyle/>
+          <a:p>
+            <a:pPr>
+              <a:lnSpc>
+                <a:spcPct val="150000"/>
+              </a:lnSpc>
+              <a:buNone/>
+            </a:pPr>
+            <a:r>
+              <a:rPr kumimoji="0" lang="en-US" altLang="en-US" sz="1300" b="0" i="0" u="none" strike="noStrike" cap="none" normalizeH="0" baseline="0">
+                <a:ln>
+                  <a:noFill/>
+                </a:ln>
+                <a:solidFill>
+                  <a:schemeClr val="tx1"/>
+                </a:solidFill>
+                <a:effectLst/>
+                <a:latin typeface="Arial" panose="020B0604020202020204" pitchFamily="34" charset="0"/>
+              </a:rPr>
+              <a:t>.</a:t>
+            </a:r>
+          </a:p>
+        </p:txBody>
+      </p:sp>
+    </p:spTree>
+    <p:extLst>
+      <p:ext uri="{BB962C8B-B14F-4D97-AF65-F5344CB8AC3E}">
+        <p14:creationId xmlns:p14="http://schemas.microsoft.com/office/powerpoint/2010/main" val="3707284920"/>
+      </p:ext>
+    </p:extLst>
+  </p:cSld>
+  <p:clrMapOvr>
+    <a:masterClrMapping/>
+  </p:clrMapOvr>
+</p:sld>
+</file>
+
+<file path=ppt/slides/slide8.xml><?xml version="1.0" encoding="utf-8"?>
+<p:sld xmlns:a="http://schemas.openxmlformats.org/drawingml/2006/main" xmlns:r="http://schemas.openxmlformats.org/officeDocument/2006/relationships" xmlns:p="http://schemas.openxmlformats.org/presentationml/2006/main">
+  <p:cSld>
+    <p:spTree>
+      <p:nvGrpSpPr>
+        <p:cNvPr id="1" name="">
+          <a:extLst>
+            <a:ext uri="{FF2B5EF4-FFF2-40B4-BE49-F238E27FC236}">
+              <a16:creationId xmlns:a16="http://schemas.microsoft.com/office/drawing/2014/main" id="{B5E10D56-004C-1E23-AEEA-DE0D80B03C19}"/>
+            </a:ext>
+          </a:extLst>
+        </p:cNvPr>
+        <p:cNvGrpSpPr/>
+        <p:nvPr/>
+      </p:nvGrpSpPr>
+      <p:grpSpPr>
+        <a:xfrm>
+          <a:off x="0" y="0"/>
+          <a:ext cx="0" cy="0"/>
+          <a:chOff x="0" y="0"/>
+          <a:chExt cx="0" cy="0"/>
+        </a:xfrm>
+      </p:grpSpPr>
+      <p:sp>
+        <p:nvSpPr>
+          <p:cNvPr id="3" name="TextBox 2">
+            <a:extLst>
+              <a:ext uri="{FF2B5EF4-FFF2-40B4-BE49-F238E27FC236}">
+                <a16:creationId xmlns:a16="http://schemas.microsoft.com/office/drawing/2014/main" id="{2E983488-3715-1103-0BC8-F22CCA34ECBE}"/>
+              </a:ext>
+            </a:extLst>
+          </p:cNvPr>
+          <p:cNvSpPr txBox="1"/>
+          <p:nvPr/>
+        </p:nvSpPr>
+        <p:spPr>
+          <a:xfrm>
+            <a:off x="217714" y="255046"/>
+            <a:ext cx="11756571" cy="355354"/>
+          </a:xfrm>
+          <a:prstGeom prst="rect">
+            <a:avLst/>
+          </a:prstGeom>
+          <a:noFill/>
+        </p:spPr>
+        <p:txBody>
+          <a:bodyPr wrap="square">
+            <a:spAutoFit/>
+          </a:bodyPr>
+          <a:lstStyle/>
+          <a:p>
+            <a:pPr>
+              <a:lnSpc>
+                <a:spcPct val="150000"/>
+              </a:lnSpc>
+              <a:buNone/>
+            </a:pPr>
+            <a:r>
+              <a:rPr kumimoji="0" lang="en-US" altLang="en-US" sz="1300" b="0" i="0" u="none" strike="noStrike" cap="none" normalizeH="0" baseline="0">
+                <a:ln>
+                  <a:noFill/>
+                </a:ln>
+                <a:solidFill>
+                  <a:schemeClr val="tx1"/>
+                </a:solidFill>
+                <a:effectLst/>
+                <a:latin typeface="Arial" panose="020B0604020202020204" pitchFamily="34" charset="0"/>
+              </a:rPr>
+              <a:t>.</a:t>
+            </a:r>
+          </a:p>
+        </p:txBody>
+      </p:sp>
+    </p:spTree>
+    <p:extLst>
+      <p:ext uri="{BB962C8B-B14F-4D97-AF65-F5344CB8AC3E}">
+        <p14:creationId xmlns:p14="http://schemas.microsoft.com/office/powerpoint/2010/main" val="2601599728"/>
+      </p:ext>
+    </p:extLst>
+  </p:cSld>
+  <p:clrMapOvr>
+    <a:masterClrMapping/>
+  </p:clrMapOvr>
+</p:sld>
+</file>
+
+<file path=ppt/slides/slide9.xml><?xml version="1.0" encoding="utf-8"?>
+<p:sld xmlns:a="http://schemas.openxmlformats.org/drawingml/2006/main" xmlns:r="http://schemas.openxmlformats.org/officeDocument/2006/relationships" xmlns:p="http://schemas.openxmlformats.org/presentationml/2006/main">
+  <p:cSld>
+    <p:spTree>
+      <p:nvGrpSpPr>
+        <p:cNvPr id="1" name="">
+          <a:extLst>
+            <a:ext uri="{FF2B5EF4-FFF2-40B4-BE49-F238E27FC236}">
+              <a16:creationId xmlns:a16="http://schemas.microsoft.com/office/drawing/2014/main" id="{E8BE4939-38A5-736A-C13E-1C9D6E26E9D7}"/>
+            </a:ext>
+          </a:extLst>
+        </p:cNvPr>
+        <p:cNvGrpSpPr/>
+        <p:nvPr/>
+      </p:nvGrpSpPr>
+      <p:grpSpPr>
+        <a:xfrm>
+          <a:off x="0" y="0"/>
+          <a:ext cx="0" cy="0"/>
+          <a:chOff x="0" y="0"/>
+          <a:chExt cx="0" cy="0"/>
+        </a:xfrm>
+      </p:grpSpPr>
+      <p:sp>
+        <p:nvSpPr>
+          <p:cNvPr id="3" name="TextBox 2">
+            <a:extLst>
+              <a:ext uri="{FF2B5EF4-FFF2-40B4-BE49-F238E27FC236}">
+                <a16:creationId xmlns:a16="http://schemas.microsoft.com/office/drawing/2014/main" id="{5CE43890-BFE2-04AD-6ACF-BFBFF903D68D}"/>
+              </a:ext>
+            </a:extLst>
+          </p:cNvPr>
+          <p:cNvSpPr txBox="1"/>
+          <p:nvPr/>
+        </p:nvSpPr>
+        <p:spPr>
+          <a:xfrm>
+            <a:off x="217714" y="255046"/>
+            <a:ext cx="11756571" cy="355354"/>
+          </a:xfrm>
+          <a:prstGeom prst="rect">
+            <a:avLst/>
+          </a:prstGeom>
+          <a:noFill/>
+        </p:spPr>
+        <p:txBody>
+          <a:bodyPr wrap="square">
+            <a:spAutoFit/>
+          </a:bodyPr>
+          <a:lstStyle/>
+          <a:p>
+            <a:pPr>
+              <a:lnSpc>
+                <a:spcPct val="150000"/>
+              </a:lnSpc>
+              <a:buNone/>
+            </a:pPr>
+            <a:r>
+              <a:rPr kumimoji="0" lang="en-US" altLang="en-US" sz="1300" b="0" i="0" u="none" strike="noStrike" cap="none" normalizeH="0" baseline="0">
+                <a:ln>
+                  <a:noFill/>
+                </a:ln>
+                <a:solidFill>
+                  <a:schemeClr val="tx1"/>
+                </a:solidFill>
+                <a:effectLst/>
+                <a:latin typeface="Arial" panose="020B0604020202020204" pitchFamily="34" charset="0"/>
+              </a:rPr>
+              <a:t>.</a:t>
+            </a:r>
+          </a:p>
+        </p:txBody>
+      </p:sp>
+    </p:spTree>
+    <p:extLst>
+      <p:ext uri="{BB962C8B-B14F-4D97-AF65-F5344CB8AC3E}">
+        <p14:creationId xmlns:p14="http://schemas.microsoft.com/office/powerpoint/2010/main" val="1353928582"/>
       </p:ext>
     </p:extLst>
   </p:cSld>
